--- a/storeinsight/tmp/property-analysis-package-test-template.pptx
+++ b/storeinsight/tmp/property-analysis-package-test-template.pptx
@@ -2,7 +2,7 @@
 <file path=ppt/slides/slide1.xml><a:t>{{PUBLISHMONTHYEAR}}</a:t>
 </file>
 
-<file path=ppt/slides/slide2.xml><a:t>{{3YIRR}}</a:t><a:t>{{3YMUL}}</a:t><a:t>{{5YIRR}}</a:t><a:t>{{5YMUL}}</a:t><a:t>{{7YIRR}}</a:t><a:t>{{7YMUL}}</a:t><a:t>{{ASSETVALUE}}</a:t><a:t>{{NOIPERCENT}}</a:t><a:t>{{EXPREDPERC}}</a:t><a:t>{{REVENUELIFT}}</a:t>
+<file path=ppt/slides/slide2.xml><a:t>{{3YIRR}}</a:t><a:t>{{3YMUL}}</a:t><a:t>{{5YIRR}}</a:t><a:t>{{5YMUL}}</a:t><a:t>{{7YIRR}}</a:t><a:t>{{7YMUL}}</a:t><a:t>{{ASSETVALUE}}</a:t><a:t>{{NOIPERCENT}}</a:t><a:t>{{EXPREDPERC}}</a:t><a:t>{{REVENUELIFT}}</a:t><a:t>{{REGION}}</a:t>
 </file>
 
 <file path=ppt/slides/slide3.xml><a:t>{{OCCPER}}</a:t><a:t>{{RENTSQFT}}</a:t><a:t>{{UNITS}}</a:t><a:t>{{RATING}}</a:t><a:t>{{REVIEWS}}</a:t><a:t>{{SNAPSHOTDESCRIPTION}}</a:t>

--- a/storeinsight/tmp/property-analysis-package-test-template.pptx
+++ b/storeinsight/tmp/property-analysis-package-test-template.pptx
@@ -6,4 +6,16 @@
 </file>
 
 <file path=ppt/slides/slide3.xml><a:t>{{OCCPER}}</a:t><a:t>{{RENTSQFT}}</a:t><a:t>{{UNITS}}</a:t><a:t>{{RATING}}</a:t><a:t>{{REVIEWS}}</a:t><a:t>{{SNAPSHOTDESCRIPTION}}</a:t>
+</file>
+
+<file path=ppt/slides/slide4.xml><a:t>{{CELL0003}}</a:t><a:t>{{CELL0031}}</a:t><a:t>{{CELL0175}}</a:t><a:t>{{CELL0187}}</a:t>
+</file>
+
+<file path=ppt/slides/slide5.xml><a:t>{{CELL0201}}</a:t><a:t>{{CELL0438}}</a:t><a:t>{{CELL0454}}</a:t><a:t>{{CELL0473}}</a:t>
+</file>
+
+<file path=ppt/slides/slide6.xml><a:t>{{CELL0490}}</a:t><a:t>{{CELL0492}}</a:t><a:t>{{CELL0506}}</a:t><a:t>({{CELL0551}})</a:t><a:t>{{CELL0568}}</a:t>
+</file>
+
+<file path=ppt/slides/slide7.xml><a:t>{{CELL0578}}</a:t><a:t>{{CELL0604}}</a:t><a:t>{{CELL0621}}</a:t><a:t>{{CELL0650}}</a:t><a:t>{{CELL0656}}</a:t><a:t>{{CELL0658}}x</a:t>
 </file>
--- a/storeinsight/tmp/property-analysis-package-test-template.pptx
+++ b/storeinsight/tmp/property-analysis-package-test-template.pptx
@@ -8,10 +8,10 @@
 <file path=ppt/slides/slide3.xml><a:t>{{OCCPER}}</a:t><a:t>{{RENTSQFT}}</a:t><a:t>{{UNITS}}</a:t><a:t>{{RATING}}</a:t><a:t>{{REVIEWS}}</a:t><a:t>{{SNAPSHOTDESCRIPTION}}</a:t>
 </file>
 
-<file path=ppt/slides/slide4.xml><a:t>{{CELL0003}}</a:t><a:t>{{CELL0031}}</a:t><a:t>{{CELL0175}}</a:t><a:t>{{CELL0187}}</a:t>
+<file path=ppt/slides/slide4.xml><a:t>{{CELL0003}}</a:t><a:t>{{CELL0031}}</a:t><a:t>{{CELL0171}}</a:t><a:t>{{CELL0175}}</a:t><a:t>{{CELL0187}}</a:t>
 </file>
 
-<file path=ppt/slides/slide5.xml><a:t>{{CELL0201}}</a:t><a:t>{{CELL0438}}</a:t><a:t>{{CELL0454}}</a:t><a:t>{{CELL0473}}</a:t>
+<file path=ppt/slides/slide5.xml><a:t>{{CELL0201}}</a:t><a:t>{{CELL0438}}</a:t><a:t>{{CELL0452}}</a:t><a:t>{{CELL0454}}</a:t><a:t>{{CELL0473}}</a:t><a:t>{{CELL0487}}</a:t>
 </file>
 
 <file path=ppt/slides/slide6.xml><a:t>{{CELL0490}}</a:t><a:t>{{CELL0492}}</a:t><a:t>{{CELL0506}}</a:t><a:t>({{CELL0551}})</a:t><a:t>{{CELL0568}}</a:t>

--- a/storeinsight/tmp/property-analysis-package-test-template.pptx
+++ b/storeinsight/tmp/property-analysis-package-test-template.pptx
@@ -8,14 +8,14 @@
 <file path=ppt/slides/slide3.xml><a:t>{{OCCPER}}</a:t><a:t>{{RENTSQFT}}</a:t><a:t>{{UNITS}}</a:t><a:t>{{RATING}}</a:t><a:t>{{REVIEWS}}</a:t><a:t>{{SNAPSHOTDESCRIPTION}}</a:t>
 </file>
 
-<file path=ppt/slides/slide4.xml><a:t>{{CELL0003}}</a:t><a:t>{{CELL0031}}</a:t><a:t>{{CELL0171}}</a:t><a:t>{{CELL0175}}</a:t><a:t>{{CELL0187}}</a:t>
+<file path=ppt/slides/slide4.xml><a:t>{{CELL0003}}</a:t><a:t>{{CELL0031}}</a:t><a:t>{{CELL0171}}</a:t><a:t>{{CELL0175}}</a:t><a:t>{{CELL0187}}</a:t><a:t>{{CELL1011}}</a:t><a:t>{{CELL1012}}</a:t>
 </file>
 
-<file path=ppt/slides/slide5.xml><a:t>{{CELL0201}}</a:t><a:t>{{CELL0438}}</a:t><a:t>{{CELL0452}}</a:t><a:t>{{CELL0454}}</a:t><a:t>{{CELL0473}}</a:t><a:t>{{CELL0487}}</a:t>
+<file path=ppt/slides/slide5.xml><a:t>{{CELL0201}}</a:t><a:t>{{CELL0438}}</a:t><a:t>{{CELL0452}}</a:t><a:t>{{CELL0454}}</a:t><a:t>{{CELL0473}}</a:t><a:t>{{CELL0487}}</a:t><a:t>{{CELL1031}}</a:t><a:t>{{CELL1035}}</a:t>
 </file>
 
-<file path=ppt/slides/slide6.xml><a:t>{{CELL0490}}</a:t><a:t>{{CELL0492}}</a:t><a:t>{{CELL0506}}</a:t><a:t>({{CELL0551}})</a:t><a:t>{{CELL0568}}</a:t>
+<file path=ppt/slides/slide6.xml><a:t>{{CELL0490}}</a:t><a:t>All-In Interest Rate (SOFR+{{CELL0492}}bps)</a:t><a:t>{{CELL0506}}</a:t><a:t>({{CELL0551}})</a:t><a:t>{{CELL0561}}</a:t><a:t>{{CELL0562}}</a:t><a:t>{{CELL0563}}</a:t><a:t>{{CELL0564}}</a:t><a:t>{{CELL0565}}</a:t><a:t>{{CELL0568}}</a:t>
 </file>
 
-<file path=ppt/slides/slide7.xml><a:t>{{CELL0578}}</a:t><a:t>{{CELL0604}}</a:t><a:t>{{CELL0621}}</a:t><a:t>{{CELL0650}}</a:t><a:t>{{CELL0656}}</a:t><a:t>{{CELL0658}}x</a:t>
+<file path=ppt/slides/slide7.xml><a:t>{{CELL0578}}</a:t><a:t>{{CELL0604}}</a:t><a:t>{{CELL0621}}</a:t><a:t>Year {{CELL0650}} NOI</a:t><a:t>Year {{CELL_0651}} NOI</a:t><a:t>Year {{CELL_0652}} NOI</a:t><a:t>Year {{CELL_0653}} NOI</a:t><a:t>Year {{CELL_0654}} NOI</a:t><a:t>{{CELL0656}}</a:t><a:t>{{CELL0658}}x</a:t>
 </file>